--- a/presentation/presentation.pptx
+++ b/presentation/presentation.pptx
@@ -6849,8 +6849,8 @@
         </p:blipFill>
         <p:spPr>
           <a:xfrm>
-            <a:off x="360045" y="6000750"/>
-            <a:ext cx="847031" cy="468000"/>
+            <a:off x="360045" y="6132830"/>
+            <a:ext cx="651562" cy="360000"/>
           </a:xfrm>
           <a:prstGeom prst="rect">
             <a:avLst/>
